--- a/dist/초4/수학/자료와규칙/초4_수학_자료와규칙_01_막대그래프_학생용.pptx
+++ b/dist/초4/수학/자료와규칙/초4_수학_자료와규칙_01_막대그래프_학생용.pptx
@@ -119,13 +119,13 @@
   <p:extLst>
     <p:ext uri="{521415D9-36F7-43E2-AB2F-B90AF26B5E84}">
       <p14:sectionLst xmlns:p14="http://schemas.microsoft.com/office/powerpoint/2010/main">
-        <p14:section name="도입" id="{5ab22488-8eb5-a90f-4132-ad6bf21b320c}">
+        <p14:section name="도입" id="{eb51b43a-ec93-87cf-86f5-0be8d25297da}">
           <p14:sldIdLst>
             <p14:sldId id="256"/>
             <p14:sldId id="257"/>
           </p14:sldIdLst>
         </p14:section>
-        <p14:section name="개념" id="{20148bb2-7b10-70e9-9149-53283d8a8ced}">
+        <p14:section name="개념" id="{26831bbc-ed6a-5db1-f5d1-9e0842a5c6b0}">
           <p14:sldIdLst>
             <p14:sldId id="258"/>
             <p14:sldId id="259"/>
@@ -133,31 +133,31 @@
             <p14:sldId id="263"/>
           </p14:sldIdLst>
         </p14:section>
-        <p14:section name="연습" id="{3aefe2dc-e558-e5e8-b422-dafa1d387e66}">
+        <p14:section name="연습" id="{382b861d-7abb-7d37-9ae2-34effd70575b}">
           <p14:sldIdLst>
             <p14:sldId id="261"/>
             <p14:sldId id="262"/>
             <p14:sldId id="264"/>
           </p14:sldIdLst>
         </p14:section>
-        <p14:section name="개념" id="{0b20122e-6d3b-0bfb-c234-44ade9c71ab9}">
+        <p14:section name="개념" id="{e0eb6de1-890d-60f1-b23f-4f9faf466d2c}">
           <p14:sldIdLst/>
         </p14:section>
-        <p14:section name="연습" id="{2ffbf20d-7007-27ec-092c-8514546e1e60}">
+        <p14:section name="연습" id="{ebac1412-b1c8-8bcc-a100-1beae4b8e3b4}">
           <p14:sldIdLst/>
         </p14:section>
-        <p14:section name="확인" id="{a003c15a-cea5-eebd-a6f0-43b981c8200a}">
+        <p14:section name="확인" id="{86a08095-90b2-1d64-7243-90d812e1991e}">
           <p14:sldIdLst>
             <p14:sldId id="265"/>
             <p14:sldId id="266"/>
           </p14:sldIdLst>
         </p14:section>
-        <p14:section name="정리" id="{d2a47b5d-065a-2926-e876-b88796bebef0}">
+        <p14:section name="정리" id="{901cbd60-a527-9df6-97f0-ba7b28ee2062}">
           <p14:sldIdLst>
             <p14:sldId id="267"/>
           </p14:sldIdLst>
         </p14:section>
-        <p14:section name="보충" id="{691e3f98-9084-cc38-2607-dc7ee7eac480}">
+        <p14:section name="보충" id="{e982b01f-c23a-c8e3-ea8f-b5a130ea09bf}">
           <p14:sldIdLst>
             <p14:sldId id="268"/>
           </p14:sldIdLst>
